--- a/docs/pitch-decks/investor-50/pptx/index.pptx
+++ b/docs/pitch-decks/investor-50/pptx/index.pptx
@@ -1019,6 +1019,30 @@
           </a:p>
         </p:txBody>
       </p:sp>
+      <p:pic>
+        <p:nvPicPr>
+          <p:cNvPr id="6" name="Picture 5" descr="02-council-deliberation.png"/>
+          <p:cNvPicPr>
+            <a:picLocks noChangeAspect="1"/>
+          </p:cNvPicPr>
+          <p:nvPr/>
+        </p:nvPicPr>
+        <p:blipFill>
+          <a:blip r:embed="rId3"/>
+          <a:stretch>
+            <a:fillRect/>
+          </a:stretch>
+        </p:blipFill>
+        <p:spPr>
+          <a:xfrm>
+            <a:off x="6400800" y="1097280"/>
+            <a:ext cx="4846320" cy="3167917"/>
+          </a:xfrm>
+          <a:prstGeom prst="rect">
+            <a:avLst/>
+          </a:prstGeom>
+        </p:spPr>
+      </p:pic>
     </p:spTree>
   </p:cSld>
   <p:clrMapOvr>
